--- a/mpProject/MP_project_results.pptx
+++ b/mpProject/MP_project_results.pptx
@@ -3704,8 +3704,8 @@
         </p:blipFill>
         <p:spPr>
           <a:xfrm>
-            <a:off x="228600" y="1550612"/>
-            <a:ext cx="6858000" cy="4579736"/>
+            <a:off x="266178" y="1097280"/>
+            <a:ext cx="6782843" cy="5486400"/>
           </a:xfrm>
           <a:prstGeom prst="rect">
             <a:avLst/>
@@ -4004,8 +4004,8 @@
         </p:blipFill>
         <p:spPr>
           <a:xfrm>
-            <a:off x="228600" y="2610697"/>
-            <a:ext cx="6858000" cy="2459565"/>
+            <a:off x="228600" y="2392643"/>
+            <a:ext cx="6858000" cy="2895674"/>
           </a:xfrm>
           <a:prstGeom prst="rect">
             <a:avLst/>
@@ -4289,8 +4289,8 @@
         </p:blipFill>
         <p:spPr>
           <a:xfrm>
-            <a:off x="228600" y="1555124"/>
-            <a:ext cx="6858000" cy="4570711"/>
+            <a:off x="266178" y="1097280"/>
+            <a:ext cx="6782843" cy="5486400"/>
           </a:xfrm>
           <a:prstGeom prst="rect">
             <a:avLst/>
@@ -4574,8 +4574,8 @@
         </p:blipFill>
         <p:spPr>
           <a:xfrm>
-            <a:off x="228600" y="2716922"/>
-            <a:ext cx="6858000" cy="2247115"/>
+            <a:off x="228600" y="2196116"/>
+            <a:ext cx="6858000" cy="3288728"/>
           </a:xfrm>
           <a:prstGeom prst="rect">
             <a:avLst/>
@@ -4673,7 +4673,7 @@
                   <a:srgbClr val="555555"/>
                 </a:solidFill>
               </a:rPr>
-              <a:t>Same logomaker construction as the MP-vs-MP logo; positions 3–24, 0/0-cell mask applied, negative letters flipped below the baseline.</a:t>
+              <a:t>Same logomaker construction as the MP-vs-MP logo; positions 3–10, 0/0-cell mask applied, negative letters flipped below the baseline.</a:t>
             </a:r>
           </a:p>
         </p:txBody>
@@ -4844,8 +4844,8 @@
         </p:blipFill>
         <p:spPr>
           <a:xfrm>
-            <a:off x="228600" y="2728912"/>
-            <a:ext cx="6858000" cy="2223135"/>
+            <a:off x="228600" y="2442582"/>
+            <a:ext cx="6858000" cy="2795796"/>
           </a:xfrm>
           <a:prstGeom prst="rect">
             <a:avLst/>
@@ -5129,8 +5129,8 @@
         </p:blipFill>
         <p:spPr>
           <a:xfrm>
-            <a:off x="228600" y="2332238"/>
-            <a:ext cx="6858000" cy="3016483"/>
+            <a:off x="228600" y="2294376"/>
+            <a:ext cx="6858000" cy="3092207"/>
           </a:xfrm>
           <a:prstGeom prst="rect">
             <a:avLst/>
@@ -6233,8 +6233,8 @@
         </p:blipFill>
         <p:spPr>
           <a:xfrm>
-            <a:off x="228600" y="1576154"/>
-            <a:ext cx="6858000" cy="4528651"/>
+            <a:off x="266178" y="1097280"/>
+            <a:ext cx="6782843" cy="5486400"/>
           </a:xfrm>
           <a:prstGeom prst="rect">
             <a:avLst/>
@@ -6533,8 +6533,8 @@
         </p:blipFill>
         <p:spPr>
           <a:xfrm>
-            <a:off x="228600" y="2610697"/>
-            <a:ext cx="6858000" cy="2459565"/>
+            <a:off x="228600" y="2392643"/>
+            <a:ext cx="6858000" cy="2895674"/>
           </a:xfrm>
           <a:prstGeom prst="rect">
             <a:avLst/>
@@ -6818,8 +6818,8 @@
         </p:blipFill>
         <p:spPr>
           <a:xfrm>
-            <a:off x="228600" y="1555124"/>
-            <a:ext cx="6858000" cy="4570711"/>
+            <a:off x="319861" y="1097280"/>
+            <a:ext cx="6675477" cy="5486400"/>
           </a:xfrm>
           <a:prstGeom prst="rect">
             <a:avLst/>
@@ -7118,8 +7118,8 @@
         </p:blipFill>
         <p:spPr>
           <a:xfrm>
-            <a:off x="228600" y="2716922"/>
-            <a:ext cx="6858000" cy="2247115"/>
+            <a:off x="228600" y="2196116"/>
+            <a:ext cx="6858000" cy="3288728"/>
           </a:xfrm>
           <a:prstGeom prst="rect">
             <a:avLst/>
@@ -7247,7 +7247,7 @@
                   <a:srgbClr val="555555"/>
                 </a:solidFill>
               </a:rPr>
-              <a:t>Built with logomaker. Letter values are the same log2 enrichment matrix used in the heatmap (with the 0/0-cell mask applied). Negative values are rendered flipped below the baseline.</a:t>
+              <a:t>Built with logomaker. Letter values are the same log2 enrichment matrix used in the heatmap (with the 0/0-cell mask applied), focused on positions 3–10 for figure readability. Negative values are rendered flipped below the baseline.</a:t>
             </a:r>
           </a:p>
         </p:txBody>
@@ -7418,8 +7418,8 @@
         </p:blipFill>
         <p:spPr>
           <a:xfrm>
-            <a:off x="228600" y="2728912"/>
-            <a:ext cx="6858000" cy="2223135"/>
+            <a:off x="228600" y="2421449"/>
+            <a:ext cx="6858000" cy="2838061"/>
           </a:xfrm>
           <a:prstGeom prst="rect">
             <a:avLst/>
@@ -7703,8 +7703,8 @@
         </p:blipFill>
         <p:spPr>
           <a:xfrm>
-            <a:off x="228600" y="2332555"/>
-            <a:ext cx="6858000" cy="3015850"/>
+            <a:off x="228600" y="2282882"/>
+            <a:ext cx="6858000" cy="3115195"/>
           </a:xfrm>
           <a:prstGeom prst="rect">
             <a:avLst/>
